--- a/content/chapter2/images/k-fold.pptx
+++ b/content/chapter2/images/k-fold.pptx
@@ -260,7 +260,7 @@
           <a:p>
             <a:fld id="{6FAB6E6E-6763-3C4B-AB05-FF7A9C7B92DA}" type="datetimeFigureOut">
               <a:rPr lang="en-US" smtClean="0"/>
-              <a:t>5/20/26</a:t>
+              <a:t>5/22/26</a:t>
             </a:fld>
             <a:endParaRPr lang="en-US"/>
           </a:p>
@@ -458,7 +458,7 @@
           <a:p>
             <a:fld id="{6FAB6E6E-6763-3C4B-AB05-FF7A9C7B92DA}" type="datetimeFigureOut">
               <a:rPr lang="en-US" smtClean="0"/>
-              <a:t>5/20/26</a:t>
+              <a:t>5/22/26</a:t>
             </a:fld>
             <a:endParaRPr lang="en-US"/>
           </a:p>
@@ -666,7 +666,7 @@
           <a:p>
             <a:fld id="{6FAB6E6E-6763-3C4B-AB05-FF7A9C7B92DA}" type="datetimeFigureOut">
               <a:rPr lang="en-US" smtClean="0"/>
-              <a:t>5/20/26</a:t>
+              <a:t>5/22/26</a:t>
             </a:fld>
             <a:endParaRPr lang="en-US"/>
           </a:p>
@@ -864,7 +864,7 @@
           <a:p>
             <a:fld id="{6FAB6E6E-6763-3C4B-AB05-FF7A9C7B92DA}" type="datetimeFigureOut">
               <a:rPr lang="en-US" smtClean="0"/>
-              <a:t>5/20/26</a:t>
+              <a:t>5/22/26</a:t>
             </a:fld>
             <a:endParaRPr lang="en-US"/>
           </a:p>
@@ -1139,7 +1139,7 @@
           <a:p>
             <a:fld id="{6FAB6E6E-6763-3C4B-AB05-FF7A9C7B92DA}" type="datetimeFigureOut">
               <a:rPr lang="en-US" smtClean="0"/>
-              <a:t>5/20/26</a:t>
+              <a:t>5/22/26</a:t>
             </a:fld>
             <a:endParaRPr lang="en-US"/>
           </a:p>
@@ -1404,7 +1404,7 @@
           <a:p>
             <a:fld id="{6FAB6E6E-6763-3C4B-AB05-FF7A9C7B92DA}" type="datetimeFigureOut">
               <a:rPr lang="en-US" smtClean="0"/>
-              <a:t>5/20/26</a:t>
+              <a:t>5/22/26</a:t>
             </a:fld>
             <a:endParaRPr lang="en-US"/>
           </a:p>
@@ -1816,7 +1816,7 @@
           <a:p>
             <a:fld id="{6FAB6E6E-6763-3C4B-AB05-FF7A9C7B92DA}" type="datetimeFigureOut">
               <a:rPr lang="en-US" smtClean="0"/>
-              <a:t>5/20/26</a:t>
+              <a:t>5/22/26</a:t>
             </a:fld>
             <a:endParaRPr lang="en-US"/>
           </a:p>
@@ -1957,7 +1957,7 @@
           <a:p>
             <a:fld id="{6FAB6E6E-6763-3C4B-AB05-FF7A9C7B92DA}" type="datetimeFigureOut">
               <a:rPr lang="en-US" smtClean="0"/>
-              <a:t>5/20/26</a:t>
+              <a:t>5/22/26</a:t>
             </a:fld>
             <a:endParaRPr lang="en-US"/>
           </a:p>
@@ -2070,7 +2070,7 @@
           <a:p>
             <a:fld id="{6FAB6E6E-6763-3C4B-AB05-FF7A9C7B92DA}" type="datetimeFigureOut">
               <a:rPr lang="en-US" smtClean="0"/>
-              <a:t>5/20/26</a:t>
+              <a:t>5/22/26</a:t>
             </a:fld>
             <a:endParaRPr lang="en-US"/>
           </a:p>
@@ -2381,7 +2381,7 @@
           <a:p>
             <a:fld id="{6FAB6E6E-6763-3C4B-AB05-FF7A9C7B92DA}" type="datetimeFigureOut">
               <a:rPr lang="en-US" smtClean="0"/>
-              <a:t>5/20/26</a:t>
+              <a:t>5/22/26</a:t>
             </a:fld>
             <a:endParaRPr lang="en-US"/>
           </a:p>
@@ -2669,7 +2669,7 @@
           <a:p>
             <a:fld id="{6FAB6E6E-6763-3C4B-AB05-FF7A9C7B92DA}" type="datetimeFigureOut">
               <a:rPr lang="en-US" smtClean="0"/>
-              <a:t>5/20/26</a:t>
+              <a:t>5/22/26</a:t>
             </a:fld>
             <a:endParaRPr lang="en-US"/>
           </a:p>
@@ -2910,7 +2910,7 @@
           <a:p>
             <a:fld id="{6FAB6E6E-6763-3C4B-AB05-FF7A9C7B92DA}" type="datetimeFigureOut">
               <a:rPr lang="en-US" smtClean="0"/>
-              <a:t>5/20/26</a:t>
+              <a:t>5/22/26</a:t>
             </a:fld>
             <a:endParaRPr lang="en-US"/>
           </a:p>
@@ -3648,6 +3648,367 @@
               <a:rPr lang="en-US" dirty="0"/>
               <a:t>Performance estimation</a:t>
             </a:r>
+          </a:p>
+        </p:txBody>
+      </p:sp>
+      <p:sp>
+        <p:nvSpPr>
+          <p:cNvPr id="2" name="Cloud 1">
+            <a:extLst>
+              <a:ext uri="{FF2B5EF4-FFF2-40B4-BE49-F238E27FC236}">
+                <a16:creationId xmlns:a16="http://schemas.microsoft.com/office/drawing/2014/main" id="{8EB4D9BC-5FBA-3B1C-87B8-0B0578F11F07}"/>
+              </a:ext>
+            </a:extLst>
+          </p:cNvPr>
+          <p:cNvSpPr/>
+          <p:nvPr/>
+        </p:nvSpPr>
+        <p:spPr>
+          <a:xfrm>
+            <a:off x="297455" y="1704910"/>
+            <a:ext cx="3018622" cy="2809186"/>
+          </a:xfrm>
+          <a:prstGeom prst="cloud">
+            <a:avLst/>
+          </a:prstGeom>
+          <a:solidFill>
+            <a:schemeClr val="accent1">
+              <a:alpha val="41212"/>
+            </a:schemeClr>
+          </a:solidFill>
+        </p:spPr>
+        <p:style>
+          <a:lnRef idx="2">
+            <a:schemeClr val="accent1">
+              <a:shade val="15000"/>
+            </a:schemeClr>
+          </a:lnRef>
+          <a:fillRef idx="1">
+            <a:schemeClr val="accent1"/>
+          </a:fillRef>
+          <a:effectRef idx="0">
+            <a:schemeClr val="accent1"/>
+          </a:effectRef>
+          <a:fontRef idx="minor">
+            <a:schemeClr val="lt1"/>
+          </a:fontRef>
+        </p:style>
+        <p:txBody>
+          <a:bodyPr rtlCol="0" anchor="ctr"/>
+          <a:lstStyle/>
+          <a:p>
+            <a:pPr algn="ctr"/>
+            <a:r>
+              <a:rPr lang="en-US"/>
+              <a:t>´</a:t>
+            </a:r>
+            <a:endParaRPr lang="en-US" dirty="0"/>
+          </a:p>
+        </p:txBody>
+      </p:sp>
+      <p:sp>
+        <p:nvSpPr>
+          <p:cNvPr id="4" name="Cloud 3">
+            <a:extLst>
+              <a:ext uri="{FF2B5EF4-FFF2-40B4-BE49-F238E27FC236}">
+                <a16:creationId xmlns:a16="http://schemas.microsoft.com/office/drawing/2014/main" id="{D2BDEF43-571A-35F2-E943-5B46562ECDE4}"/>
+              </a:ext>
+            </a:extLst>
+          </p:cNvPr>
+          <p:cNvSpPr/>
+          <p:nvPr/>
+        </p:nvSpPr>
+        <p:spPr>
+          <a:xfrm>
+            <a:off x="5075107" y="1735491"/>
+            <a:ext cx="1860507" cy="1411082"/>
+          </a:xfrm>
+          <a:prstGeom prst="cloud">
+            <a:avLst/>
+          </a:prstGeom>
+          <a:solidFill>
+            <a:schemeClr val="accent1">
+              <a:alpha val="39074"/>
+            </a:schemeClr>
+          </a:solidFill>
+        </p:spPr>
+        <p:style>
+          <a:lnRef idx="2">
+            <a:schemeClr val="accent1">
+              <a:shade val="15000"/>
+            </a:schemeClr>
+          </a:lnRef>
+          <a:fillRef idx="1">
+            <a:schemeClr val="accent1"/>
+          </a:fillRef>
+          <a:effectRef idx="0">
+            <a:schemeClr val="accent1"/>
+          </a:effectRef>
+          <a:fontRef idx="minor">
+            <a:schemeClr val="lt1"/>
+          </a:fontRef>
+        </p:style>
+        <p:txBody>
+          <a:bodyPr rtlCol="0" anchor="ctr"/>
+          <a:lstStyle/>
+          <a:p>
+            <a:pPr algn="ctr"/>
+            <a:endParaRPr lang="en-US"/>
+          </a:p>
+        </p:txBody>
+      </p:sp>
+      <p:sp>
+        <p:nvSpPr>
+          <p:cNvPr id="9" name="Cloud 8">
+            <a:extLst>
+              <a:ext uri="{FF2B5EF4-FFF2-40B4-BE49-F238E27FC236}">
+                <a16:creationId xmlns:a16="http://schemas.microsoft.com/office/drawing/2014/main" id="{4A3790A9-8C39-A294-2A5F-2D54A304C70C}"/>
+              </a:ext>
+            </a:extLst>
+          </p:cNvPr>
+          <p:cNvSpPr/>
+          <p:nvPr/>
+        </p:nvSpPr>
+        <p:spPr>
+          <a:xfrm>
+            <a:off x="2882204" y="4315847"/>
+            <a:ext cx="2008419" cy="2095789"/>
+          </a:xfrm>
+          <a:prstGeom prst="cloud">
+            <a:avLst/>
+          </a:prstGeom>
+          <a:solidFill>
+            <a:schemeClr val="accent1">
+              <a:alpha val="39074"/>
+            </a:schemeClr>
+          </a:solidFill>
+        </p:spPr>
+        <p:style>
+          <a:lnRef idx="2">
+            <a:schemeClr val="accent1">
+              <a:shade val="15000"/>
+            </a:schemeClr>
+          </a:lnRef>
+          <a:fillRef idx="1">
+            <a:schemeClr val="accent1"/>
+          </a:fillRef>
+          <a:effectRef idx="0">
+            <a:schemeClr val="accent1"/>
+          </a:effectRef>
+          <a:fontRef idx="minor">
+            <a:schemeClr val="lt1"/>
+          </a:fontRef>
+        </p:style>
+        <p:txBody>
+          <a:bodyPr rtlCol="0" anchor="ctr"/>
+          <a:lstStyle/>
+          <a:p>
+            <a:pPr algn="ctr"/>
+            <a:endParaRPr lang="en-US"/>
+          </a:p>
+        </p:txBody>
+      </p:sp>
+      <p:sp>
+        <p:nvSpPr>
+          <p:cNvPr id="13" name="Cloud 12">
+            <a:extLst>
+              <a:ext uri="{FF2B5EF4-FFF2-40B4-BE49-F238E27FC236}">
+                <a16:creationId xmlns:a16="http://schemas.microsoft.com/office/drawing/2014/main" id="{7A8E0D8F-CFD1-B0A3-6589-6B7517436D9F}"/>
+              </a:ext>
+            </a:extLst>
+          </p:cNvPr>
+          <p:cNvSpPr/>
+          <p:nvPr/>
+        </p:nvSpPr>
+        <p:spPr>
+          <a:xfrm>
+            <a:off x="5835563" y="4133580"/>
+            <a:ext cx="2008419" cy="2095789"/>
+          </a:xfrm>
+          <a:prstGeom prst="cloud">
+            <a:avLst/>
+          </a:prstGeom>
+          <a:solidFill>
+            <a:schemeClr val="accent1">
+              <a:alpha val="39074"/>
+            </a:schemeClr>
+          </a:solidFill>
+        </p:spPr>
+        <p:style>
+          <a:lnRef idx="2">
+            <a:schemeClr val="accent1">
+              <a:shade val="15000"/>
+            </a:schemeClr>
+          </a:lnRef>
+          <a:fillRef idx="1">
+            <a:schemeClr val="accent1"/>
+          </a:fillRef>
+          <a:effectRef idx="0">
+            <a:schemeClr val="accent1"/>
+          </a:effectRef>
+          <a:fontRef idx="minor">
+            <a:schemeClr val="lt1"/>
+          </a:fontRef>
+        </p:style>
+        <p:txBody>
+          <a:bodyPr rtlCol="0" anchor="ctr"/>
+          <a:lstStyle/>
+          <a:p>
+            <a:pPr algn="ctr"/>
+            <a:endParaRPr lang="en-US"/>
+          </a:p>
+        </p:txBody>
+      </p:sp>
+      <p:sp>
+        <p:nvSpPr>
+          <p:cNvPr id="18" name="Cloud 17">
+            <a:extLst>
+              <a:ext uri="{FF2B5EF4-FFF2-40B4-BE49-F238E27FC236}">
+                <a16:creationId xmlns:a16="http://schemas.microsoft.com/office/drawing/2014/main" id="{BB6D7DDE-049C-6592-5B72-5B1EB4292EBB}"/>
+              </a:ext>
+            </a:extLst>
+          </p:cNvPr>
+          <p:cNvSpPr/>
+          <p:nvPr/>
+        </p:nvSpPr>
+        <p:spPr>
+          <a:xfrm rot="18269326">
+            <a:off x="8924855" y="4258732"/>
+            <a:ext cx="1650547" cy="1988117"/>
+          </a:xfrm>
+          <a:prstGeom prst="cloud">
+            <a:avLst/>
+          </a:prstGeom>
+          <a:solidFill>
+            <a:schemeClr val="accent1">
+              <a:alpha val="39074"/>
+            </a:schemeClr>
+          </a:solidFill>
+        </p:spPr>
+        <p:style>
+          <a:lnRef idx="2">
+            <a:schemeClr val="accent1">
+              <a:shade val="15000"/>
+            </a:schemeClr>
+          </a:lnRef>
+          <a:fillRef idx="1">
+            <a:schemeClr val="accent1"/>
+          </a:fillRef>
+          <a:effectRef idx="0">
+            <a:schemeClr val="accent1"/>
+          </a:effectRef>
+          <a:fontRef idx="minor">
+            <a:schemeClr val="lt1"/>
+          </a:fontRef>
+        </p:style>
+        <p:txBody>
+          <a:bodyPr rtlCol="0" anchor="ctr"/>
+          <a:lstStyle/>
+          <a:p>
+            <a:pPr algn="ctr"/>
+            <a:endParaRPr lang="en-US"/>
+          </a:p>
+        </p:txBody>
+      </p:sp>
+      <p:sp>
+        <p:nvSpPr>
+          <p:cNvPr id="19" name="Cloud 18">
+            <a:extLst>
+              <a:ext uri="{FF2B5EF4-FFF2-40B4-BE49-F238E27FC236}">
+                <a16:creationId xmlns:a16="http://schemas.microsoft.com/office/drawing/2014/main" id="{2EBFC7AF-E85F-D8E0-62DD-F476E5C65788}"/>
+              </a:ext>
+            </a:extLst>
+          </p:cNvPr>
+          <p:cNvSpPr/>
+          <p:nvPr/>
+        </p:nvSpPr>
+        <p:spPr>
+          <a:xfrm rot="18269326">
+            <a:off x="9117940" y="1540723"/>
+            <a:ext cx="2008419" cy="2095789"/>
+          </a:xfrm>
+          <a:prstGeom prst="cloud">
+            <a:avLst/>
+          </a:prstGeom>
+          <a:solidFill>
+            <a:schemeClr val="accent1">
+              <a:alpha val="39074"/>
+            </a:schemeClr>
+          </a:solidFill>
+        </p:spPr>
+        <p:style>
+          <a:lnRef idx="2">
+            <a:schemeClr val="accent1">
+              <a:shade val="15000"/>
+            </a:schemeClr>
+          </a:lnRef>
+          <a:fillRef idx="1">
+            <a:schemeClr val="accent1"/>
+          </a:fillRef>
+          <a:effectRef idx="0">
+            <a:schemeClr val="accent1"/>
+          </a:effectRef>
+          <a:fontRef idx="minor">
+            <a:schemeClr val="lt1"/>
+          </a:fontRef>
+        </p:style>
+        <p:txBody>
+          <a:bodyPr rtlCol="0" anchor="ctr"/>
+          <a:lstStyle/>
+          <a:p>
+            <a:pPr algn="ctr"/>
+            <a:endParaRPr lang="en-US"/>
+          </a:p>
+        </p:txBody>
+      </p:sp>
+      <p:sp>
+        <p:nvSpPr>
+          <p:cNvPr id="20" name="Cloud 19">
+            <a:extLst>
+              <a:ext uri="{FF2B5EF4-FFF2-40B4-BE49-F238E27FC236}">
+                <a16:creationId xmlns:a16="http://schemas.microsoft.com/office/drawing/2014/main" id="{E9151A74-8714-B25F-6204-2E5D1BD8E244}"/>
+              </a:ext>
+            </a:extLst>
+          </p:cNvPr>
+          <p:cNvSpPr/>
+          <p:nvPr/>
+        </p:nvSpPr>
+        <p:spPr>
+          <a:xfrm rot="18269326">
+            <a:off x="6462350" y="2577282"/>
+            <a:ext cx="1837278" cy="1818795"/>
+          </a:xfrm>
+          <a:prstGeom prst="cloud">
+            <a:avLst/>
+          </a:prstGeom>
+          <a:solidFill>
+            <a:schemeClr val="accent1">
+              <a:alpha val="39074"/>
+            </a:schemeClr>
+          </a:solidFill>
+        </p:spPr>
+        <p:style>
+          <a:lnRef idx="2">
+            <a:schemeClr val="accent1">
+              <a:shade val="15000"/>
+            </a:schemeClr>
+          </a:lnRef>
+          <a:fillRef idx="1">
+            <a:schemeClr val="accent1"/>
+          </a:fillRef>
+          <a:effectRef idx="0">
+            <a:schemeClr val="accent1"/>
+          </a:effectRef>
+          <a:fontRef idx="minor">
+            <a:schemeClr val="lt1"/>
+          </a:fontRef>
+        </p:style>
+        <p:txBody>
+          <a:bodyPr rtlCol="0" anchor="ctr"/>
+          <a:lstStyle/>
+          <a:p>
+            <a:pPr algn="ctr"/>
+            <a:endParaRPr lang="en-US"/>
           </a:p>
         </p:txBody>
       </p:sp>

--- a/content/chapter2/images/k-fold.pptx
+++ b/content/chapter2/images/k-fold.pptx
@@ -6,7 +6,8 @@
   </p:sldMasterIdLst>
   <p:sldIdLst>
     <p:sldId id="256" r:id="rId2"/>
-    <p:sldId id="257" r:id="rId3"/>
+    <p:sldId id="258" r:id="rId3"/>
+    <p:sldId id="257" r:id="rId4"/>
   </p:sldIdLst>
   <p:sldSz cx="12192000" cy="6858000"/>
   <p:notesSz cx="6858000" cy="9144000"/>
@@ -260,7 +261,7 @@
           <a:p>
             <a:fld id="{6FAB6E6E-6763-3C4B-AB05-FF7A9C7B92DA}" type="datetimeFigureOut">
               <a:rPr lang="en-US" smtClean="0"/>
-              <a:t>5/22/26</a:t>
+              <a:t>6/2/26</a:t>
             </a:fld>
             <a:endParaRPr lang="en-US"/>
           </a:p>
@@ -458,7 +459,7 @@
           <a:p>
             <a:fld id="{6FAB6E6E-6763-3C4B-AB05-FF7A9C7B92DA}" type="datetimeFigureOut">
               <a:rPr lang="en-US" smtClean="0"/>
-              <a:t>5/22/26</a:t>
+              <a:t>6/2/26</a:t>
             </a:fld>
             <a:endParaRPr lang="en-US"/>
           </a:p>
@@ -666,7 +667,7 @@
           <a:p>
             <a:fld id="{6FAB6E6E-6763-3C4B-AB05-FF7A9C7B92DA}" type="datetimeFigureOut">
               <a:rPr lang="en-US" smtClean="0"/>
-              <a:t>5/22/26</a:t>
+              <a:t>6/2/26</a:t>
             </a:fld>
             <a:endParaRPr lang="en-US"/>
           </a:p>
@@ -864,7 +865,7 @@
           <a:p>
             <a:fld id="{6FAB6E6E-6763-3C4B-AB05-FF7A9C7B92DA}" type="datetimeFigureOut">
               <a:rPr lang="en-US" smtClean="0"/>
-              <a:t>5/22/26</a:t>
+              <a:t>6/2/26</a:t>
             </a:fld>
             <a:endParaRPr lang="en-US"/>
           </a:p>
@@ -1139,7 +1140,7 @@
           <a:p>
             <a:fld id="{6FAB6E6E-6763-3C4B-AB05-FF7A9C7B92DA}" type="datetimeFigureOut">
               <a:rPr lang="en-US" smtClean="0"/>
-              <a:t>5/22/26</a:t>
+              <a:t>6/2/26</a:t>
             </a:fld>
             <a:endParaRPr lang="en-US"/>
           </a:p>
@@ -1404,7 +1405,7 @@
           <a:p>
             <a:fld id="{6FAB6E6E-6763-3C4B-AB05-FF7A9C7B92DA}" type="datetimeFigureOut">
               <a:rPr lang="en-US" smtClean="0"/>
-              <a:t>5/22/26</a:t>
+              <a:t>6/2/26</a:t>
             </a:fld>
             <a:endParaRPr lang="en-US"/>
           </a:p>
@@ -1816,7 +1817,7 @@
           <a:p>
             <a:fld id="{6FAB6E6E-6763-3C4B-AB05-FF7A9C7B92DA}" type="datetimeFigureOut">
               <a:rPr lang="en-US" smtClean="0"/>
-              <a:t>5/22/26</a:t>
+              <a:t>6/2/26</a:t>
             </a:fld>
             <a:endParaRPr lang="en-US"/>
           </a:p>
@@ -1957,7 +1958,7 @@
           <a:p>
             <a:fld id="{6FAB6E6E-6763-3C4B-AB05-FF7A9C7B92DA}" type="datetimeFigureOut">
               <a:rPr lang="en-US" smtClean="0"/>
-              <a:t>5/22/26</a:t>
+              <a:t>6/2/26</a:t>
             </a:fld>
             <a:endParaRPr lang="en-US"/>
           </a:p>
@@ -2070,7 +2071,7 @@
           <a:p>
             <a:fld id="{6FAB6E6E-6763-3C4B-AB05-FF7A9C7B92DA}" type="datetimeFigureOut">
               <a:rPr lang="en-US" smtClean="0"/>
-              <a:t>5/22/26</a:t>
+              <a:t>6/2/26</a:t>
             </a:fld>
             <a:endParaRPr lang="en-US"/>
           </a:p>
@@ -2381,7 +2382,7 @@
           <a:p>
             <a:fld id="{6FAB6E6E-6763-3C4B-AB05-FF7A9C7B92DA}" type="datetimeFigureOut">
               <a:rPr lang="en-US" smtClean="0"/>
-              <a:t>5/22/26</a:t>
+              <a:t>6/2/26</a:t>
             </a:fld>
             <a:endParaRPr lang="en-US"/>
           </a:p>
@@ -2669,7 +2670,7 @@
           <a:p>
             <a:fld id="{6FAB6E6E-6763-3C4B-AB05-FF7A9C7B92DA}" type="datetimeFigureOut">
               <a:rPr lang="en-US" smtClean="0"/>
-              <a:t>5/22/26</a:t>
+              <a:t>6/2/26</a:t>
             </a:fld>
             <a:endParaRPr lang="en-US"/>
           </a:p>
@@ -2910,7 +2911,7 @@
           <a:p>
             <a:fld id="{6FAB6E6E-6763-3C4B-AB05-FF7A9C7B92DA}" type="datetimeFigureOut">
               <a:rPr lang="en-US" smtClean="0"/>
-              <a:t>5/22/26</a:t>
+              <a:t>6/2/26</a:t>
             </a:fld>
             <a:endParaRPr lang="en-US"/>
           </a:p>
@@ -4026,6 +4027,522 @@
 </file>
 
 <file path=ppt/slides/slide2.xml><?xml version="1.0" encoding="utf-8"?>
+<p:sld xmlns:a="http://schemas.openxmlformats.org/drawingml/2006/main" xmlns:r="http://schemas.openxmlformats.org/officeDocument/2006/relationships" xmlns:p="http://schemas.openxmlformats.org/presentationml/2006/main">
+  <p:cSld>
+    <p:spTree>
+      <p:nvGrpSpPr>
+        <p:cNvPr id="1" name="">
+          <a:extLst>
+            <a:ext uri="{FF2B5EF4-FFF2-40B4-BE49-F238E27FC236}">
+              <a16:creationId xmlns:a16="http://schemas.microsoft.com/office/drawing/2014/main" id="{05436360-51B8-90F3-76EE-EB688E0225BD}"/>
+            </a:ext>
+          </a:extLst>
+        </p:cNvPr>
+        <p:cNvGrpSpPr/>
+        <p:nvPr/>
+      </p:nvGrpSpPr>
+      <p:grpSpPr>
+        <a:xfrm>
+          <a:off x="0" y="0"/>
+          <a:ext cx="0" cy="0"/>
+          <a:chOff x="0" y="0"/>
+          <a:chExt cx="0" cy="0"/>
+        </a:xfrm>
+      </p:grpSpPr>
+      <p:grpSp>
+        <p:nvGrpSpPr>
+          <p:cNvPr id="21" name="Group 20">
+            <a:extLst>
+              <a:ext uri="{FF2B5EF4-FFF2-40B4-BE49-F238E27FC236}">
+                <a16:creationId xmlns:a16="http://schemas.microsoft.com/office/drawing/2014/main" id="{1BBD1203-6CF0-84C9-9F1B-BF558D7C6C1B}"/>
+              </a:ext>
+            </a:extLst>
+          </p:cNvPr>
+          <p:cNvGrpSpPr/>
+          <p:nvPr/>
+        </p:nvGrpSpPr>
+        <p:grpSpPr>
+          <a:xfrm>
+            <a:off x="1236570" y="1531643"/>
+            <a:ext cx="9772693" cy="4219162"/>
+            <a:chOff x="1236570" y="1531643"/>
+            <a:chExt cx="9772693" cy="4219162"/>
+          </a:xfrm>
+        </p:grpSpPr>
+        <p:grpSp>
+          <p:nvGrpSpPr>
+            <p:cNvPr id="11" name="Group 10">
+              <a:extLst>
+                <a:ext uri="{FF2B5EF4-FFF2-40B4-BE49-F238E27FC236}">
+                  <a16:creationId xmlns:a16="http://schemas.microsoft.com/office/drawing/2014/main" id="{74D754B1-A0A1-DCF3-E14E-EA4AF3E7019A}"/>
+                </a:ext>
+              </a:extLst>
+            </p:cNvPr>
+            <p:cNvGrpSpPr/>
+            <p:nvPr/>
+          </p:nvGrpSpPr>
+          <p:grpSpPr>
+            <a:xfrm>
+              <a:off x="1236570" y="1934013"/>
+              <a:ext cx="9772693" cy="3816792"/>
+              <a:chOff x="1236570" y="1934013"/>
+              <a:chExt cx="9772693" cy="3816792"/>
+            </a:xfrm>
+          </p:grpSpPr>
+          <p:pic>
+            <p:nvPicPr>
+              <p:cNvPr id="5" name="Picture 4">
+                <a:extLst>
+                  <a:ext uri="{FF2B5EF4-FFF2-40B4-BE49-F238E27FC236}">
+                    <a16:creationId xmlns:a16="http://schemas.microsoft.com/office/drawing/2014/main" id="{E16AEF0F-3254-1EA7-7B16-A66D3AB8F156}"/>
+                  </a:ext>
+                </a:extLst>
+              </p:cNvPr>
+              <p:cNvPicPr>
+                <a:picLocks noChangeAspect="1"/>
+              </p:cNvPicPr>
+              <p:nvPr/>
+            </p:nvPicPr>
+            <p:blipFill>
+              <a:blip r:embed="rId2"/>
+              <a:srcRect l="8846" t="4346"/>
+              <a:stretch>
+                <a:fillRect/>
+              </a:stretch>
+            </p:blipFill>
+            <p:spPr>
+              <a:xfrm rot="20942249">
+                <a:off x="3844886" y="1950741"/>
+                <a:ext cx="1123721" cy="2187138"/>
+              </a:xfrm>
+              <a:prstGeom prst="rect">
+                <a:avLst/>
+              </a:prstGeom>
+            </p:spPr>
+          </p:pic>
+          <p:pic>
+            <p:nvPicPr>
+              <p:cNvPr id="6" name="Picture 5">
+                <a:extLst>
+                  <a:ext uri="{FF2B5EF4-FFF2-40B4-BE49-F238E27FC236}">
+                    <a16:creationId xmlns:a16="http://schemas.microsoft.com/office/drawing/2014/main" id="{8FE7C16F-2569-2A41-6CED-EE0F096AFEC9}"/>
+                  </a:ext>
+                </a:extLst>
+              </p:cNvPr>
+              <p:cNvPicPr>
+                <a:picLocks noChangeAspect="1"/>
+              </p:cNvPicPr>
+              <p:nvPr/>
+            </p:nvPicPr>
+            <p:blipFill>
+              <a:blip r:embed="rId3"/>
+              <a:stretch>
+                <a:fillRect/>
+              </a:stretch>
+            </p:blipFill>
+            <p:spPr>
+              <a:xfrm rot="948372">
+                <a:off x="5151419" y="1934013"/>
+                <a:ext cx="1783891" cy="732548"/>
+              </a:xfrm>
+              <a:prstGeom prst="rect">
+                <a:avLst/>
+              </a:prstGeom>
+            </p:spPr>
+          </p:pic>
+          <p:pic>
+            <p:nvPicPr>
+              <p:cNvPr id="7" name="Picture 6">
+                <a:extLst>
+                  <a:ext uri="{FF2B5EF4-FFF2-40B4-BE49-F238E27FC236}">
+                    <a16:creationId xmlns:a16="http://schemas.microsoft.com/office/drawing/2014/main" id="{BC357D23-2DEA-8125-ACAE-EF0083931395}"/>
+                  </a:ext>
+                </a:extLst>
+              </p:cNvPr>
+              <p:cNvPicPr>
+                <a:picLocks noChangeAspect="1"/>
+              </p:cNvPicPr>
+              <p:nvPr/>
+            </p:nvPicPr>
+            <p:blipFill>
+              <a:blip r:embed="rId4"/>
+              <a:srcRect l="18974" t="11716" r="4844" b="11514"/>
+              <a:stretch>
+                <a:fillRect/>
+              </a:stretch>
+            </p:blipFill>
+            <p:spPr>
+              <a:xfrm rot="1691634">
+                <a:off x="1236570" y="2197570"/>
+                <a:ext cx="1123721" cy="1872849"/>
+              </a:xfrm>
+              <a:prstGeom prst="rect">
+                <a:avLst/>
+              </a:prstGeom>
+            </p:spPr>
+          </p:pic>
+          <p:sp>
+            <p:nvSpPr>
+              <p:cNvPr id="10" name="Rectangle 9">
+                <a:extLst>
+                  <a:ext uri="{FF2B5EF4-FFF2-40B4-BE49-F238E27FC236}">
+                    <a16:creationId xmlns:a16="http://schemas.microsoft.com/office/drawing/2014/main" id="{7C6EFB6D-6432-CDC7-03BB-39A73C0B0056}"/>
+                  </a:ext>
+                </a:extLst>
+              </p:cNvPr>
+              <p:cNvSpPr/>
+              <p:nvPr/>
+            </p:nvSpPr>
+            <p:spPr>
+              <a:xfrm rot="20405342">
+                <a:off x="3128790" y="4979624"/>
+                <a:ext cx="1432193" cy="771181"/>
+              </a:xfrm>
+              <a:prstGeom prst="rect">
+                <a:avLst/>
+              </a:prstGeom>
+            </p:spPr>
+            <p:style>
+              <a:lnRef idx="2">
+                <a:schemeClr val="accent1">
+                  <a:shade val="15000"/>
+                </a:schemeClr>
+              </a:lnRef>
+              <a:fillRef idx="1">
+                <a:schemeClr val="accent1"/>
+              </a:fillRef>
+              <a:effectRef idx="0">
+                <a:schemeClr val="accent1"/>
+              </a:effectRef>
+              <a:fontRef idx="minor">
+                <a:schemeClr val="lt1"/>
+              </a:fontRef>
+            </p:style>
+            <p:txBody>
+              <a:bodyPr rtlCol="0" anchor="ctr"/>
+              <a:lstStyle/>
+              <a:p>
+                <a:pPr algn="ctr"/>
+                <a:endParaRPr lang="en-US" dirty="0"/>
+              </a:p>
+            </p:txBody>
+          </p:sp>
+          <p:sp>
+            <p:nvSpPr>
+              <p:cNvPr id="12" name="Rectangle 11">
+                <a:extLst>
+                  <a:ext uri="{FF2B5EF4-FFF2-40B4-BE49-F238E27FC236}">
+                    <a16:creationId xmlns:a16="http://schemas.microsoft.com/office/drawing/2014/main" id="{83CB3919-51A2-792F-F3B0-193B231BAEF7}"/>
+                  </a:ext>
+                </a:extLst>
+              </p:cNvPr>
+              <p:cNvSpPr/>
+              <p:nvPr/>
+            </p:nvSpPr>
+            <p:spPr>
+              <a:xfrm rot="1156982">
+                <a:off x="5971142" y="4768467"/>
+                <a:ext cx="1671552" cy="771181"/>
+              </a:xfrm>
+              <a:prstGeom prst="rect">
+                <a:avLst/>
+              </a:prstGeom>
+            </p:spPr>
+            <p:style>
+              <a:lnRef idx="2">
+                <a:schemeClr val="accent1">
+                  <a:shade val="15000"/>
+                </a:schemeClr>
+              </a:lnRef>
+              <a:fillRef idx="1">
+                <a:schemeClr val="accent1"/>
+              </a:fillRef>
+              <a:effectRef idx="0">
+                <a:schemeClr val="accent1"/>
+              </a:effectRef>
+              <a:fontRef idx="minor">
+                <a:schemeClr val="lt1"/>
+              </a:fontRef>
+            </p:style>
+            <p:txBody>
+              <a:bodyPr rtlCol="0" anchor="ctr"/>
+              <a:lstStyle/>
+              <a:p>
+                <a:pPr algn="ctr"/>
+                <a:endParaRPr lang="en-US" dirty="0"/>
+              </a:p>
+            </p:txBody>
+          </p:sp>
+          <p:sp>
+            <p:nvSpPr>
+              <p:cNvPr id="16" name="Rectangle 15">
+                <a:extLst>
+                  <a:ext uri="{FF2B5EF4-FFF2-40B4-BE49-F238E27FC236}">
+                    <a16:creationId xmlns:a16="http://schemas.microsoft.com/office/drawing/2014/main" id="{51B13E14-57B7-0265-E81B-17DD399A975A}"/>
+                  </a:ext>
+                </a:extLst>
+              </p:cNvPr>
+              <p:cNvSpPr/>
+              <p:nvPr/>
+            </p:nvSpPr>
+            <p:spPr>
+              <a:xfrm rot="20405342">
+                <a:off x="6227526" y="2963302"/>
+                <a:ext cx="2655112" cy="771181"/>
+              </a:xfrm>
+              <a:prstGeom prst="rect">
+                <a:avLst/>
+              </a:prstGeom>
+              <a:solidFill>
+                <a:schemeClr val="accent2"/>
+              </a:solidFill>
+            </p:spPr>
+            <p:style>
+              <a:lnRef idx="2">
+                <a:schemeClr val="accent1">
+                  <a:shade val="15000"/>
+                </a:schemeClr>
+              </a:lnRef>
+              <a:fillRef idx="1">
+                <a:schemeClr val="accent1"/>
+              </a:fillRef>
+              <a:effectRef idx="0">
+                <a:schemeClr val="accent1"/>
+              </a:effectRef>
+              <a:fontRef idx="minor">
+                <a:schemeClr val="lt1"/>
+              </a:fontRef>
+            </p:style>
+            <p:txBody>
+              <a:bodyPr rtlCol="0" anchor="ctr"/>
+              <a:lstStyle/>
+              <a:p>
+                <a:pPr algn="ctr"/>
+                <a:endParaRPr lang="en-US" dirty="0"/>
+              </a:p>
+            </p:txBody>
+          </p:sp>
+          <p:sp>
+            <p:nvSpPr>
+              <p:cNvPr id="17" name="Rectangle 16">
+                <a:extLst>
+                  <a:ext uri="{FF2B5EF4-FFF2-40B4-BE49-F238E27FC236}">
+                    <a16:creationId xmlns:a16="http://schemas.microsoft.com/office/drawing/2014/main" id="{A51DAB16-1879-F4B2-968E-699D5C143ADF}"/>
+                  </a:ext>
+                </a:extLst>
+              </p:cNvPr>
+              <p:cNvSpPr/>
+              <p:nvPr/>
+            </p:nvSpPr>
+            <p:spPr>
+              <a:xfrm rot="1759307">
+                <a:off x="8490999" y="4890974"/>
+                <a:ext cx="2518264" cy="771181"/>
+              </a:xfrm>
+              <a:prstGeom prst="rect">
+                <a:avLst/>
+              </a:prstGeom>
+              <a:solidFill>
+                <a:schemeClr val="accent2"/>
+              </a:solidFill>
+            </p:spPr>
+            <p:style>
+              <a:lnRef idx="2">
+                <a:schemeClr val="accent1">
+                  <a:shade val="15000"/>
+                </a:schemeClr>
+              </a:lnRef>
+              <a:fillRef idx="1">
+                <a:schemeClr val="accent1"/>
+              </a:fillRef>
+              <a:effectRef idx="0">
+                <a:schemeClr val="accent1"/>
+              </a:effectRef>
+              <a:fontRef idx="minor">
+                <a:schemeClr val="lt1"/>
+              </a:fontRef>
+            </p:style>
+            <p:txBody>
+              <a:bodyPr rtlCol="0" anchor="ctr"/>
+              <a:lstStyle/>
+              <a:p>
+                <a:pPr algn="ctr"/>
+                <a:endParaRPr lang="en-US" dirty="0"/>
+              </a:p>
+            </p:txBody>
+          </p:sp>
+          <p:sp>
+            <p:nvSpPr>
+              <p:cNvPr id="3" name="Rectangle 2">
+                <a:extLst>
+                  <a:ext uri="{FF2B5EF4-FFF2-40B4-BE49-F238E27FC236}">
+                    <a16:creationId xmlns:a16="http://schemas.microsoft.com/office/drawing/2014/main" id="{DC94CB43-3CBA-7BDE-8C4D-544036532386}"/>
+                  </a:ext>
+                </a:extLst>
+              </p:cNvPr>
+              <p:cNvSpPr/>
+              <p:nvPr/>
+            </p:nvSpPr>
+            <p:spPr>
+              <a:xfrm>
+                <a:off x="1422400" y="2772228"/>
+                <a:ext cx="812800" cy="656771"/>
+              </a:xfrm>
+              <a:prstGeom prst="rect">
+                <a:avLst/>
+              </a:prstGeom>
+              <a:solidFill>
+                <a:srgbClr val="FFFF00"/>
+              </a:solidFill>
+              <a:ln>
+                <a:noFill/>
+              </a:ln>
+            </p:spPr>
+            <p:style>
+              <a:lnRef idx="2">
+                <a:schemeClr val="accent1">
+                  <a:shade val="15000"/>
+                </a:schemeClr>
+              </a:lnRef>
+              <a:fillRef idx="1">
+                <a:schemeClr val="accent1"/>
+              </a:fillRef>
+              <a:effectRef idx="0">
+                <a:schemeClr val="accent1"/>
+              </a:effectRef>
+              <a:fontRef idx="minor">
+                <a:schemeClr val="lt1"/>
+              </a:fontRef>
+            </p:style>
+            <p:txBody>
+              <a:bodyPr rtlCol="0" anchor="ctr"/>
+              <a:lstStyle/>
+              <a:p>
+                <a:pPr algn="ctr"/>
+                <a:endParaRPr lang="en-US"/>
+              </a:p>
+            </p:txBody>
+          </p:sp>
+          <p:sp>
+            <p:nvSpPr>
+              <p:cNvPr id="8" name="Rectangle 7">
+                <a:extLst>
+                  <a:ext uri="{FF2B5EF4-FFF2-40B4-BE49-F238E27FC236}">
+                    <a16:creationId xmlns:a16="http://schemas.microsoft.com/office/drawing/2014/main" id="{111DE831-5DE4-3CE4-14EB-7710E4D98CB5}"/>
+                  </a:ext>
+                </a:extLst>
+              </p:cNvPr>
+              <p:cNvSpPr/>
+              <p:nvPr/>
+            </p:nvSpPr>
+            <p:spPr>
+              <a:xfrm rot="999758">
+                <a:off x="5558087" y="1976411"/>
+                <a:ext cx="1352592" cy="795978"/>
+              </a:xfrm>
+              <a:prstGeom prst="rect">
+                <a:avLst/>
+              </a:prstGeom>
+              <a:solidFill>
+                <a:schemeClr val="bg1"/>
+              </a:solidFill>
+              <a:ln>
+                <a:noFill/>
+              </a:ln>
+            </p:spPr>
+            <p:style>
+              <a:lnRef idx="2">
+                <a:schemeClr val="accent1">
+                  <a:shade val="15000"/>
+                </a:schemeClr>
+              </a:lnRef>
+              <a:fillRef idx="1">
+                <a:schemeClr val="accent1"/>
+              </a:fillRef>
+              <a:effectRef idx="0">
+                <a:schemeClr val="accent1"/>
+              </a:effectRef>
+              <a:fontRef idx="minor">
+                <a:schemeClr val="lt1"/>
+              </a:fontRef>
+            </p:style>
+            <p:txBody>
+              <a:bodyPr rtlCol="0" anchor="ctr"/>
+              <a:lstStyle/>
+              <a:p>
+                <a:pPr algn="ctr"/>
+                <a:endParaRPr lang="en-US"/>
+              </a:p>
+            </p:txBody>
+          </p:sp>
+        </p:grpSp>
+        <p:sp>
+          <p:nvSpPr>
+            <p:cNvPr id="14" name="Rectangle 13">
+              <a:extLst>
+                <a:ext uri="{FF2B5EF4-FFF2-40B4-BE49-F238E27FC236}">
+                  <a16:creationId xmlns:a16="http://schemas.microsoft.com/office/drawing/2014/main" id="{BA4B4EF5-32E2-ECCC-0A4D-F0196D5CC733}"/>
+                </a:ext>
+              </a:extLst>
+            </p:cNvPr>
+            <p:cNvSpPr/>
+            <p:nvPr/>
+          </p:nvSpPr>
+          <p:spPr>
+            <a:xfrm rot="999758">
+              <a:off x="4245413" y="1531643"/>
+              <a:ext cx="1673256" cy="2002352"/>
+            </a:xfrm>
+            <a:prstGeom prst="rect">
+              <a:avLst/>
+            </a:prstGeom>
+            <a:solidFill>
+              <a:schemeClr val="bg1"/>
+            </a:solidFill>
+            <a:ln>
+              <a:noFill/>
+            </a:ln>
+          </p:spPr>
+          <p:style>
+            <a:lnRef idx="2">
+              <a:schemeClr val="accent1">
+                <a:shade val="15000"/>
+              </a:schemeClr>
+            </a:lnRef>
+            <a:fillRef idx="1">
+              <a:schemeClr val="accent1"/>
+            </a:fillRef>
+            <a:effectRef idx="0">
+              <a:schemeClr val="accent1"/>
+            </a:effectRef>
+            <a:fontRef idx="minor">
+              <a:schemeClr val="lt1"/>
+            </a:fontRef>
+          </p:style>
+          <p:txBody>
+            <a:bodyPr rtlCol="0" anchor="ctr"/>
+            <a:lstStyle/>
+            <a:p>
+              <a:pPr algn="ctr"/>
+              <a:endParaRPr lang="en-US"/>
+            </a:p>
+          </p:txBody>
+        </p:sp>
+      </p:grpSp>
+    </p:spTree>
+    <p:extLst>
+      <p:ext uri="{BB962C8B-B14F-4D97-AF65-F5344CB8AC3E}">
+        <p14:creationId xmlns:p14="http://schemas.microsoft.com/office/powerpoint/2010/main" val="2752443053"/>
+      </p:ext>
+    </p:extLst>
+  </p:cSld>
+  <p:clrMapOvr>
+    <a:masterClrMapping/>
+  </p:clrMapOvr>
+</p:sld>
+</file>
+
+<file path=ppt/slides/slide3.xml><?xml version="1.0" encoding="utf-8"?>
 <p:sld xmlns:a="http://schemas.openxmlformats.org/drawingml/2006/main" xmlns:r="http://schemas.openxmlformats.org/officeDocument/2006/relationships" xmlns:p="http://schemas.openxmlformats.org/presentationml/2006/main">
   <p:cSld>
     <p:spTree>

--- a/content/chapter2/images/k-fold.pptx
+++ b/content/chapter2/images/k-fold.pptx
@@ -4545,6 +4545,14 @@
 <file path=ppt/slides/slide3.xml><?xml version="1.0" encoding="utf-8"?>
 <p:sld xmlns:a="http://schemas.openxmlformats.org/drawingml/2006/main" xmlns:r="http://schemas.openxmlformats.org/officeDocument/2006/relationships" xmlns:p="http://schemas.openxmlformats.org/presentationml/2006/main">
   <p:cSld>
+    <p:bg>
+      <p:bgPr>
+        <a:solidFill>
+          <a:schemeClr val="bg1"/>
+        </a:solidFill>
+        <a:effectLst/>
+      </p:bgPr>
+    </p:bg>
     <p:spTree>
       <p:nvGrpSpPr>
         <p:cNvPr id="1" name=""/>
@@ -4559,66 +4567,87 @@
           <a:chExt cx="0" cy="0"/>
         </a:xfrm>
       </p:grpSpPr>
-      <p:pic>
-        <p:nvPicPr>
-          <p:cNvPr id="5" name="Picture 4">
-            <a:extLst>
-              <a:ext uri="{FF2B5EF4-FFF2-40B4-BE49-F238E27FC236}">
-                <a16:creationId xmlns:a16="http://schemas.microsoft.com/office/drawing/2014/main" id="{7B29FE7F-45F7-DBC3-8CDF-9F85D42D654A}"/>
-              </a:ext>
-            </a:extLst>
-          </p:cNvPr>
-          <p:cNvPicPr>
-            <a:picLocks noChangeAspect="1"/>
-          </p:cNvPicPr>
+      <p:grpSp>
+        <p:nvGrpSpPr>
+          <p:cNvPr id="6" name="Group 5">
+            <a:extLst>
+              <a:ext uri="{FF2B5EF4-FFF2-40B4-BE49-F238E27FC236}">
+                <a16:creationId xmlns:a16="http://schemas.microsoft.com/office/drawing/2014/main" id="{2CC02134-499A-B56F-D5B3-BAED43974AA4}"/>
+              </a:ext>
+            </a:extLst>
+          </p:cNvPr>
+          <p:cNvGrpSpPr/>
           <p:nvPr/>
-        </p:nvPicPr>
-        <p:blipFill>
-          <a:blip r:embed="rId2"/>
-          <a:stretch>
-            <a:fillRect/>
-          </a:stretch>
-        </p:blipFill>
-        <p:spPr>
+        </p:nvGrpSpPr>
+        <p:grpSpPr>
           <a:xfrm>
-            <a:off x="602686" y="1899752"/>
-            <a:ext cx="5577609" cy="3512180"/>
+            <a:off x="1124639" y="1980562"/>
+            <a:ext cx="9319352" cy="3333749"/>
+            <a:chOff x="1124639" y="1980562"/>
+            <a:chExt cx="9319352" cy="3333749"/>
           </a:xfrm>
-          <a:prstGeom prst="rect">
-            <a:avLst/>
-          </a:prstGeom>
-        </p:spPr>
-      </p:pic>
-      <p:pic>
-        <p:nvPicPr>
-          <p:cNvPr id="8" name="Picture 7">
-            <a:extLst>
-              <a:ext uri="{FF2B5EF4-FFF2-40B4-BE49-F238E27FC236}">
-                <a16:creationId xmlns:a16="http://schemas.microsoft.com/office/drawing/2014/main" id="{B0DA7723-2663-AC8A-F679-D3DD6A86D509}"/>
-              </a:ext>
-            </a:extLst>
-          </p:cNvPr>
-          <p:cNvPicPr>
-            <a:picLocks noChangeAspect="1"/>
-          </p:cNvPicPr>
-          <p:nvPr/>
-        </p:nvPicPr>
-        <p:blipFill>
-          <a:blip r:embed="rId3"/>
-          <a:stretch>
-            <a:fillRect/>
-          </a:stretch>
-        </p:blipFill>
-        <p:spPr>
-          <a:xfrm>
-            <a:off x="6096000" y="1914121"/>
-            <a:ext cx="4372264" cy="3497811"/>
-          </a:xfrm>
-          <a:prstGeom prst="rect">
-            <a:avLst/>
-          </a:prstGeom>
-        </p:spPr>
-      </p:pic>
+        </p:grpSpPr>
+        <p:pic>
+          <p:nvPicPr>
+            <p:cNvPr id="4" name="Picture 3">
+              <a:extLst>
+                <a:ext uri="{FF2B5EF4-FFF2-40B4-BE49-F238E27FC236}">
+                  <a16:creationId xmlns:a16="http://schemas.microsoft.com/office/drawing/2014/main" id="{131486E6-6040-3344-7AEA-DC51D1408316}"/>
+                </a:ext>
+              </a:extLst>
+            </p:cNvPr>
+            <p:cNvPicPr>
+              <a:picLocks noChangeAspect="1"/>
+            </p:cNvPicPr>
+            <p:nvPr/>
+          </p:nvPicPr>
+          <p:blipFill>
+            <a:blip r:embed="rId2"/>
+            <a:stretch>
+              <a:fillRect/>
+            </a:stretch>
+          </p:blipFill>
+          <p:spPr>
+            <a:xfrm>
+              <a:off x="6416306" y="2036362"/>
+              <a:ext cx="4027685" cy="3222147"/>
+            </a:xfrm>
+            <a:prstGeom prst="rect">
+              <a:avLst/>
+            </a:prstGeom>
+          </p:spPr>
+        </p:pic>
+        <p:pic>
+          <p:nvPicPr>
+            <p:cNvPr id="5" name="Picture 4">
+              <a:extLst>
+                <a:ext uri="{FF2B5EF4-FFF2-40B4-BE49-F238E27FC236}">
+                  <a16:creationId xmlns:a16="http://schemas.microsoft.com/office/drawing/2014/main" id="{7B29FE7F-45F7-DBC3-8CDF-9F85D42D654A}"/>
+                </a:ext>
+              </a:extLst>
+            </p:cNvPr>
+            <p:cNvPicPr>
+              <a:picLocks noChangeAspect="1"/>
+            </p:cNvPicPr>
+            <p:nvPr/>
+          </p:nvPicPr>
+          <p:blipFill>
+            <a:blip r:embed="rId3"/>
+            <a:stretch>
+              <a:fillRect/>
+            </a:stretch>
+          </p:blipFill>
+          <p:spPr>
+            <a:xfrm>
+              <a:off x="1124639" y="1980562"/>
+              <a:ext cx="5291667" cy="3333749"/>
+            </a:xfrm>
+            <a:prstGeom prst="rect">
+              <a:avLst/>
+            </a:prstGeom>
+          </p:spPr>
+        </p:pic>
+      </p:grpSp>
     </p:spTree>
     <p:extLst>
       <p:ext uri="{BB962C8B-B14F-4D97-AF65-F5344CB8AC3E}">
